--- a/presentation/TableTap-Restaurant-Owner-Deck.pptx
+++ b/presentation/TableTap-Restaurant-Owner-Deck.pptx
@@ -10677,7 +10677,7 @@
               </a:defRPr>
             </a:pPr>
             <a:r>
-              <a:t>owner@varanasi.com</a:t>
+              <a:t>owner@dvadtech.com</a:t>
             </a:r>
           </a:p>
         </p:txBody>
